--- a/episodes/02-build-your-first-agent/slides/ep02-build-your-first-agent.pptx
+++ b/episodes/02-build-your-first-agent/slides/ep02-build-your-first-agent.pptx
@@ -2019,8 +2019,8 @@
         </p:nvSpPr>
         <p:spPr>
           <a:xfrm>
-            <a:off x="548640" y="1143000"/>
-            <a:ext cx="8229600" cy="726440"/>
+            <a:off x="548640" y="1051560"/>
+            <a:ext cx="8229600" cy="782320"/>
           </a:xfrm>
           <a:prstGeom prst="rect">
             <a:avLst/>
@@ -2036,7 +2036,7 @@
               <a:buNone/>
             </a:pPr>
             <a:r>
-              <a:rPr lang="en-US" sz="4400" b="1" spc="-200" kern="0" dirty="0">
+              <a:rPr lang="en-US" sz="4400" b="1" spc="100" kern="0" dirty="0">
                 <a:solidFill>
                   <a:srgbClr val="FFFFFF"/>
                 </a:solidFill>
@@ -2044,13 +2044,13 @@
                 <a:ea typeface="Geist" pitchFamily="34" charset="-122"/>
                 <a:cs typeface="Geist" pitchFamily="34" charset="-120"/>
               </a:rPr>
-              <a:t>learn with </a:t>
-            </a:r>
-            <a:pPr indent="0" marL="0">
-              <a:buNone/>
-            </a:pPr>
-            <a:r>
-              <a:rPr lang="en-US" sz="4400" b="1" spc="-200" kern="0" dirty="0">
+              <a:t>learn  with  </a:t>
+            </a:r>
+            <a:pPr indent="0" marL="0">
+              <a:buNone/>
+            </a:pPr>
+            <a:r>
+              <a:rPr lang="en-US" sz="4400" b="1" spc="100" kern="0" dirty="0">
                 <a:solidFill>
                   <a:srgbClr val="FF5700"/>
                 </a:solidFill>
@@ -2064,7 +2064,7 @@
               <a:buNone/>
             </a:pPr>
             <a:r>
-              <a:rPr lang="en-US" sz="1800" b="1" spc="-200" kern="0" dirty="0">
+              <a:rPr lang="en-US" sz="1800" b="1" spc="100" kern="0" dirty="0">
                 <a:solidFill>
                   <a:srgbClr val="FF5700"/>
                 </a:solidFill>
@@ -2072,7 +2072,7 @@
                 <a:ea typeface="Geist" pitchFamily="34" charset="-122"/>
                 <a:cs typeface="Geist" pitchFamily="34" charset="-120"/>
               </a:rPr>
-              <a:t>■</a:t>
+              <a:t>  ■</a:t>
             </a:r>
             <a:endParaRPr lang="en-US" sz="4400" dirty="0"/>
           </a:p>
@@ -2086,7 +2086,7 @@
         </p:nvSpPr>
         <p:spPr>
           <a:xfrm>
-            <a:off x="548640" y="2057400"/>
+            <a:off x="548640" y="2194560"/>
             <a:ext cx="7680960" cy="1371600"/>
           </a:xfrm>
           <a:prstGeom prst="rect">
@@ -2327,8 +2327,8 @@
         </p:nvSpPr>
         <p:spPr>
           <a:xfrm>
-            <a:off x="457200" y="292608"/>
-            <a:ext cx="8229600" cy="231140"/>
+            <a:off x="457200" y="274320"/>
+            <a:ext cx="8229600" cy="248920"/>
           </a:xfrm>
           <a:prstGeom prst="rect">
             <a:avLst/>
@@ -2344,7 +2344,7 @@
               <a:buNone/>
             </a:pPr>
             <a:r>
-              <a:rPr lang="en-US" sz="1400" b="1" spc="-200" kern="0" dirty="0">
+              <a:rPr lang="en-US" sz="1400" b="1" spc="100" kern="0" dirty="0">
                 <a:solidFill>
                   <a:srgbClr val="1C1C1C"/>
                 </a:solidFill>
@@ -2352,13 +2352,13 @@
                 <a:ea typeface="Geist" pitchFamily="34" charset="-122"/>
                 <a:cs typeface="Geist" pitchFamily="34" charset="-120"/>
               </a:rPr>
-              <a:t>learn with </a:t>
-            </a:r>
-            <a:pPr indent="0" marL="0">
-              <a:buNone/>
-            </a:pPr>
-            <a:r>
-              <a:rPr lang="en-US" sz="1400" b="1" spc="-200" kern="0" dirty="0">
+              <a:t>learn  with  </a:t>
+            </a:r>
+            <a:pPr indent="0" marL="0">
+              <a:buNone/>
+            </a:pPr>
+            <a:r>
+              <a:rPr lang="en-US" sz="1400" b="1" spc="100" kern="0" dirty="0">
                 <a:solidFill>
                   <a:srgbClr val="FF5700"/>
                 </a:solidFill>
@@ -2372,7 +2372,7 @@
               <a:buNone/>
             </a:pPr>
             <a:r>
-              <a:rPr lang="en-US" sz="600" b="1" spc="-200" kern="0" dirty="0">
+              <a:rPr lang="en-US" sz="600" b="1" spc="100" kern="0" dirty="0">
                 <a:solidFill>
                   <a:srgbClr val="FF5700"/>
                 </a:solidFill>
@@ -2380,7 +2380,7 @@
                 <a:ea typeface="Geist" pitchFamily="34" charset="-122"/>
                 <a:cs typeface="Geist" pitchFamily="34" charset="-120"/>
               </a:rPr>
-              <a:t>■</a:t>
+              <a:t>  ■</a:t>
             </a:r>
             <a:endParaRPr lang="en-US" sz="1400" dirty="0"/>
           </a:p>
@@ -2394,7 +2394,7 @@
         </p:nvSpPr>
         <p:spPr>
           <a:xfrm>
-            <a:off x="457200" y="813816"/>
+            <a:off x="457200" y="905256"/>
             <a:ext cx="91440" cy="91440"/>
           </a:xfrm>
           <a:prstGeom prst="rect">
@@ -2414,7 +2414,7 @@
         </p:nvSpPr>
         <p:spPr>
           <a:xfrm>
-            <a:off x="621792" y="713232"/>
+            <a:off x="621792" y="804672"/>
             <a:ext cx="6400800" cy="292608"/>
           </a:xfrm>
           <a:prstGeom prst="rect">
@@ -2453,7 +2453,7 @@
         </p:nvSpPr>
         <p:spPr>
           <a:xfrm>
-            <a:off x="457200" y="987552"/>
+            <a:off x="457200" y="1078992"/>
             <a:ext cx="8229600" cy="640080"/>
           </a:xfrm>
           <a:prstGeom prst="rect">
@@ -3255,8 +3255,8 @@
         </p:nvSpPr>
         <p:spPr>
           <a:xfrm>
-            <a:off x="548640" y="411480"/>
-            <a:ext cx="8229600" cy="297180"/>
+            <a:off x="548640" y="384048"/>
+            <a:ext cx="8229600" cy="320040"/>
           </a:xfrm>
           <a:prstGeom prst="rect">
             <a:avLst/>
@@ -3272,7 +3272,7 @@
               <a:buNone/>
             </a:pPr>
             <a:r>
-              <a:rPr lang="en-US" sz="1800" b="1" spc="-200" kern="0" dirty="0">
+              <a:rPr lang="en-US" sz="1800" b="1" spc="100" kern="0" dirty="0">
                 <a:solidFill>
                   <a:srgbClr val="FFFFFF"/>
                 </a:solidFill>
@@ -3280,13 +3280,13 @@
                 <a:ea typeface="Geist" pitchFamily="34" charset="-122"/>
                 <a:cs typeface="Geist" pitchFamily="34" charset="-120"/>
               </a:rPr>
-              <a:t>learn with </a:t>
-            </a:r>
-            <a:pPr indent="0" marL="0">
-              <a:buNone/>
-            </a:pPr>
-            <a:r>
-              <a:rPr lang="en-US" sz="1800" b="1" spc="-200" kern="0" dirty="0">
+              <a:t>learn  with  </a:t>
+            </a:r>
+            <a:pPr indent="0" marL="0">
+              <a:buNone/>
+            </a:pPr>
+            <a:r>
+              <a:rPr lang="en-US" sz="1800" b="1" spc="100" kern="0" dirty="0">
                 <a:solidFill>
                   <a:srgbClr val="FF5700"/>
                 </a:solidFill>
@@ -3300,7 +3300,7 @@
               <a:buNone/>
             </a:pPr>
             <a:r>
-              <a:rPr lang="en-US" sz="800" b="1" spc="-200" kern="0" dirty="0">
+              <a:rPr lang="en-US" sz="700" b="1" spc="100" kern="0" dirty="0">
                 <a:solidFill>
                   <a:srgbClr val="FF5700"/>
                 </a:solidFill>
@@ -3308,7 +3308,7 @@
                 <a:ea typeface="Geist" pitchFamily="34" charset="-122"/>
                 <a:cs typeface="Geist" pitchFamily="34" charset="-120"/>
               </a:rPr>
-              <a:t>■</a:t>
+              <a:t>  ■</a:t>
             </a:r>
             <a:endParaRPr lang="en-US" sz="1800" dirty="0"/>
           </a:p>
@@ -3929,8 +3929,8 @@
         </p:nvSpPr>
         <p:spPr>
           <a:xfrm>
-            <a:off x="457200" y="292608"/>
-            <a:ext cx="8229600" cy="231140"/>
+            <a:off x="457200" y="274320"/>
+            <a:ext cx="8229600" cy="248920"/>
           </a:xfrm>
           <a:prstGeom prst="rect">
             <a:avLst/>
@@ -3946,7 +3946,7 @@
               <a:buNone/>
             </a:pPr>
             <a:r>
-              <a:rPr lang="en-US" sz="1400" b="1" spc="-200" kern="0" dirty="0">
+              <a:rPr lang="en-US" sz="1400" b="1" spc="100" kern="0" dirty="0">
                 <a:solidFill>
                   <a:srgbClr val="1C1C1C"/>
                 </a:solidFill>
@@ -3954,13 +3954,13 @@
                 <a:ea typeface="Geist" pitchFamily="34" charset="-122"/>
                 <a:cs typeface="Geist" pitchFamily="34" charset="-120"/>
               </a:rPr>
-              <a:t>learn with </a:t>
-            </a:r>
-            <a:pPr indent="0" marL="0">
-              <a:buNone/>
-            </a:pPr>
-            <a:r>
-              <a:rPr lang="en-US" sz="1400" b="1" spc="-200" kern="0" dirty="0">
+              <a:t>learn  with  </a:t>
+            </a:r>
+            <a:pPr indent="0" marL="0">
+              <a:buNone/>
+            </a:pPr>
+            <a:r>
+              <a:rPr lang="en-US" sz="1400" b="1" spc="100" kern="0" dirty="0">
                 <a:solidFill>
                   <a:srgbClr val="FF5700"/>
                 </a:solidFill>
@@ -3974,7 +3974,7 @@
               <a:buNone/>
             </a:pPr>
             <a:r>
-              <a:rPr lang="en-US" sz="600" b="1" spc="-200" kern="0" dirty="0">
+              <a:rPr lang="en-US" sz="600" b="1" spc="100" kern="0" dirty="0">
                 <a:solidFill>
                   <a:srgbClr val="FF5700"/>
                 </a:solidFill>
@@ -3982,7 +3982,7 @@
                 <a:ea typeface="Geist" pitchFamily="34" charset="-122"/>
                 <a:cs typeface="Geist" pitchFamily="34" charset="-120"/>
               </a:rPr>
-              <a:t>■</a:t>
+              <a:t>  ■</a:t>
             </a:r>
             <a:endParaRPr lang="en-US" sz="1400" dirty="0"/>
           </a:p>
@@ -3996,7 +3996,7 @@
         </p:nvSpPr>
         <p:spPr>
           <a:xfrm>
-            <a:off x="457200" y="813816"/>
+            <a:off x="457200" y="905256"/>
             <a:ext cx="91440" cy="91440"/>
           </a:xfrm>
           <a:prstGeom prst="rect">
@@ -4016,7 +4016,7 @@
         </p:nvSpPr>
         <p:spPr>
           <a:xfrm>
-            <a:off x="621792" y="713232"/>
+            <a:off x="621792" y="804672"/>
             <a:ext cx="6400800" cy="292608"/>
           </a:xfrm>
           <a:prstGeom prst="rect">
@@ -4055,7 +4055,7 @@
         </p:nvSpPr>
         <p:spPr>
           <a:xfrm>
-            <a:off x="457200" y="987552"/>
+            <a:off x="457200" y="1078992"/>
             <a:ext cx="8229600" cy="640080"/>
           </a:xfrm>
           <a:prstGeom prst="rect">
@@ -4775,8 +4775,8 @@
         </p:nvSpPr>
         <p:spPr>
           <a:xfrm>
-            <a:off x="457200" y="292608"/>
-            <a:ext cx="8229600" cy="231140"/>
+            <a:off x="457200" y="274320"/>
+            <a:ext cx="8229600" cy="248920"/>
           </a:xfrm>
           <a:prstGeom prst="rect">
             <a:avLst/>
@@ -4792,7 +4792,7 @@
               <a:buNone/>
             </a:pPr>
             <a:r>
-              <a:rPr lang="en-US" sz="1400" b="1" spc="-200" kern="0" dirty="0">
+              <a:rPr lang="en-US" sz="1400" b="1" spc="100" kern="0" dirty="0">
                 <a:solidFill>
                   <a:srgbClr val="1C1C1C"/>
                 </a:solidFill>
@@ -4800,13 +4800,13 @@
                 <a:ea typeface="Geist" pitchFamily="34" charset="-122"/>
                 <a:cs typeface="Geist" pitchFamily="34" charset="-120"/>
               </a:rPr>
-              <a:t>learn with </a:t>
-            </a:r>
-            <a:pPr indent="0" marL="0">
-              <a:buNone/>
-            </a:pPr>
-            <a:r>
-              <a:rPr lang="en-US" sz="1400" b="1" spc="-200" kern="0" dirty="0">
+              <a:t>learn  with  </a:t>
+            </a:r>
+            <a:pPr indent="0" marL="0">
+              <a:buNone/>
+            </a:pPr>
+            <a:r>
+              <a:rPr lang="en-US" sz="1400" b="1" spc="100" kern="0" dirty="0">
                 <a:solidFill>
                   <a:srgbClr val="FF5700"/>
                 </a:solidFill>
@@ -4820,7 +4820,7 @@
               <a:buNone/>
             </a:pPr>
             <a:r>
-              <a:rPr lang="en-US" sz="600" b="1" spc="-200" kern="0" dirty="0">
+              <a:rPr lang="en-US" sz="600" b="1" spc="100" kern="0" dirty="0">
                 <a:solidFill>
                   <a:srgbClr val="FF5700"/>
                 </a:solidFill>
@@ -4828,7 +4828,7 @@
                 <a:ea typeface="Geist" pitchFamily="34" charset="-122"/>
                 <a:cs typeface="Geist" pitchFamily="34" charset="-120"/>
               </a:rPr>
-              <a:t>■</a:t>
+              <a:t>  ■</a:t>
             </a:r>
             <a:endParaRPr lang="en-US" sz="1400" dirty="0"/>
           </a:p>
@@ -4842,7 +4842,7 @@
         </p:nvSpPr>
         <p:spPr>
           <a:xfrm>
-            <a:off x="457200" y="813816"/>
+            <a:off x="457200" y="905256"/>
             <a:ext cx="91440" cy="91440"/>
           </a:xfrm>
           <a:prstGeom prst="rect">
@@ -4862,7 +4862,7 @@
         </p:nvSpPr>
         <p:spPr>
           <a:xfrm>
-            <a:off x="621792" y="713232"/>
+            <a:off x="621792" y="804672"/>
             <a:ext cx="6400800" cy="292608"/>
           </a:xfrm>
           <a:prstGeom prst="rect">
@@ -4901,7 +4901,7 @@
         </p:nvSpPr>
         <p:spPr>
           <a:xfrm>
-            <a:off x="457200" y="987552"/>
+            <a:off x="457200" y="1078992"/>
             <a:ext cx="8229600" cy="640080"/>
           </a:xfrm>
           <a:prstGeom prst="rect">
@@ -5600,8 +5600,8 @@
         </p:nvSpPr>
         <p:spPr>
           <a:xfrm>
-            <a:off x="457200" y="292608"/>
-            <a:ext cx="8229600" cy="231140"/>
+            <a:off x="457200" y="274320"/>
+            <a:ext cx="8229600" cy="248920"/>
           </a:xfrm>
           <a:prstGeom prst="rect">
             <a:avLst/>
@@ -5617,7 +5617,7 @@
               <a:buNone/>
             </a:pPr>
             <a:r>
-              <a:rPr lang="en-US" sz="1400" b="1" spc="-200" kern="0" dirty="0">
+              <a:rPr lang="en-US" sz="1400" b="1" spc="100" kern="0" dirty="0">
                 <a:solidFill>
                   <a:srgbClr val="1C1C1C"/>
                 </a:solidFill>
@@ -5625,13 +5625,13 @@
                 <a:ea typeface="Geist" pitchFamily="34" charset="-122"/>
                 <a:cs typeface="Geist" pitchFamily="34" charset="-120"/>
               </a:rPr>
-              <a:t>learn with </a:t>
-            </a:r>
-            <a:pPr indent="0" marL="0">
-              <a:buNone/>
-            </a:pPr>
-            <a:r>
-              <a:rPr lang="en-US" sz="1400" b="1" spc="-200" kern="0" dirty="0">
+              <a:t>learn  with  </a:t>
+            </a:r>
+            <a:pPr indent="0" marL="0">
+              <a:buNone/>
+            </a:pPr>
+            <a:r>
+              <a:rPr lang="en-US" sz="1400" b="1" spc="100" kern="0" dirty="0">
                 <a:solidFill>
                   <a:srgbClr val="FF5700"/>
                 </a:solidFill>
@@ -5645,7 +5645,7 @@
               <a:buNone/>
             </a:pPr>
             <a:r>
-              <a:rPr lang="en-US" sz="600" b="1" spc="-200" kern="0" dirty="0">
+              <a:rPr lang="en-US" sz="600" b="1" spc="100" kern="0" dirty="0">
                 <a:solidFill>
                   <a:srgbClr val="FF5700"/>
                 </a:solidFill>
@@ -5653,7 +5653,7 @@
                 <a:ea typeface="Geist" pitchFamily="34" charset="-122"/>
                 <a:cs typeface="Geist" pitchFamily="34" charset="-120"/>
               </a:rPr>
-              <a:t>■</a:t>
+              <a:t>  ■</a:t>
             </a:r>
             <a:endParaRPr lang="en-US" sz="1400" dirty="0"/>
           </a:p>
@@ -5667,7 +5667,7 @@
         </p:nvSpPr>
         <p:spPr>
           <a:xfrm>
-            <a:off x="457200" y="813816"/>
+            <a:off x="457200" y="905256"/>
             <a:ext cx="91440" cy="91440"/>
           </a:xfrm>
           <a:prstGeom prst="rect">
@@ -5687,7 +5687,7 @@
         </p:nvSpPr>
         <p:spPr>
           <a:xfrm>
-            <a:off x="621792" y="713232"/>
+            <a:off x="621792" y="804672"/>
             <a:ext cx="6400800" cy="292608"/>
           </a:xfrm>
           <a:prstGeom prst="rect">
@@ -5726,7 +5726,7 @@
         </p:nvSpPr>
         <p:spPr>
           <a:xfrm>
-            <a:off x="457200" y="987552"/>
+            <a:off x="457200" y="1078992"/>
             <a:ext cx="8229600" cy="640080"/>
           </a:xfrm>
           <a:prstGeom prst="rect">
@@ -6725,8 +6725,8 @@
         </p:nvSpPr>
         <p:spPr>
           <a:xfrm>
-            <a:off x="457200" y="292608"/>
-            <a:ext cx="8229600" cy="231140"/>
+            <a:off x="457200" y="274320"/>
+            <a:ext cx="8229600" cy="248920"/>
           </a:xfrm>
           <a:prstGeom prst="rect">
             <a:avLst/>
@@ -6742,7 +6742,7 @@
               <a:buNone/>
             </a:pPr>
             <a:r>
-              <a:rPr lang="en-US" sz="1400" b="1" spc="-200" kern="0" dirty="0">
+              <a:rPr lang="en-US" sz="1400" b="1" spc="100" kern="0" dirty="0">
                 <a:solidFill>
                   <a:srgbClr val="1C1C1C"/>
                 </a:solidFill>
@@ -6750,13 +6750,13 @@
                 <a:ea typeface="Geist" pitchFamily="34" charset="-122"/>
                 <a:cs typeface="Geist" pitchFamily="34" charset="-120"/>
               </a:rPr>
-              <a:t>learn with </a:t>
-            </a:r>
-            <a:pPr indent="0" marL="0">
-              <a:buNone/>
-            </a:pPr>
-            <a:r>
-              <a:rPr lang="en-US" sz="1400" b="1" spc="-200" kern="0" dirty="0">
+              <a:t>learn  with  </a:t>
+            </a:r>
+            <a:pPr indent="0" marL="0">
+              <a:buNone/>
+            </a:pPr>
+            <a:r>
+              <a:rPr lang="en-US" sz="1400" b="1" spc="100" kern="0" dirty="0">
                 <a:solidFill>
                   <a:srgbClr val="FF5700"/>
                 </a:solidFill>
@@ -6770,7 +6770,7 @@
               <a:buNone/>
             </a:pPr>
             <a:r>
-              <a:rPr lang="en-US" sz="600" b="1" spc="-200" kern="0" dirty="0">
+              <a:rPr lang="en-US" sz="600" b="1" spc="100" kern="0" dirty="0">
                 <a:solidFill>
                   <a:srgbClr val="FF5700"/>
                 </a:solidFill>
@@ -6778,7 +6778,7 @@
                 <a:ea typeface="Geist" pitchFamily="34" charset="-122"/>
                 <a:cs typeface="Geist" pitchFamily="34" charset="-120"/>
               </a:rPr>
-              <a:t>■</a:t>
+              <a:t>  ■</a:t>
             </a:r>
             <a:endParaRPr lang="en-US" sz="1400" dirty="0"/>
           </a:p>
@@ -6792,7 +6792,7 @@
         </p:nvSpPr>
         <p:spPr>
           <a:xfrm>
-            <a:off x="457200" y="813816"/>
+            <a:off x="457200" y="905256"/>
             <a:ext cx="91440" cy="91440"/>
           </a:xfrm>
           <a:prstGeom prst="rect">
@@ -6812,7 +6812,7 @@
         </p:nvSpPr>
         <p:spPr>
           <a:xfrm>
-            <a:off x="621792" y="713232"/>
+            <a:off x="621792" y="804672"/>
             <a:ext cx="6400800" cy="292608"/>
           </a:xfrm>
           <a:prstGeom prst="rect">
@@ -6851,7 +6851,7 @@
         </p:nvSpPr>
         <p:spPr>
           <a:xfrm>
-            <a:off x="457200" y="987552"/>
+            <a:off x="457200" y="1078992"/>
             <a:ext cx="8229600" cy="640080"/>
           </a:xfrm>
           <a:prstGeom prst="rect">
@@ -7653,8 +7653,8 @@
         </p:nvSpPr>
         <p:spPr>
           <a:xfrm>
-            <a:off x="457200" y="292608"/>
-            <a:ext cx="8229600" cy="231140"/>
+            <a:off x="457200" y="274320"/>
+            <a:ext cx="8229600" cy="248920"/>
           </a:xfrm>
           <a:prstGeom prst="rect">
             <a:avLst/>
@@ -7670,7 +7670,7 @@
               <a:buNone/>
             </a:pPr>
             <a:r>
-              <a:rPr lang="en-US" sz="1400" b="1" spc="-200" kern="0" dirty="0">
+              <a:rPr lang="en-US" sz="1400" b="1" spc="100" kern="0" dirty="0">
                 <a:solidFill>
                   <a:srgbClr val="1C1C1C"/>
                 </a:solidFill>
@@ -7678,13 +7678,13 @@
                 <a:ea typeface="Geist" pitchFamily="34" charset="-122"/>
                 <a:cs typeface="Geist" pitchFamily="34" charset="-120"/>
               </a:rPr>
-              <a:t>learn with </a:t>
-            </a:r>
-            <a:pPr indent="0" marL="0">
-              <a:buNone/>
-            </a:pPr>
-            <a:r>
-              <a:rPr lang="en-US" sz="1400" b="1" spc="-200" kern="0" dirty="0">
+              <a:t>learn  with  </a:t>
+            </a:r>
+            <a:pPr indent="0" marL="0">
+              <a:buNone/>
+            </a:pPr>
+            <a:r>
+              <a:rPr lang="en-US" sz="1400" b="1" spc="100" kern="0" dirty="0">
                 <a:solidFill>
                   <a:srgbClr val="FF5700"/>
                 </a:solidFill>
@@ -7698,7 +7698,7 @@
               <a:buNone/>
             </a:pPr>
             <a:r>
-              <a:rPr lang="en-US" sz="600" b="1" spc="-200" kern="0" dirty="0">
+              <a:rPr lang="en-US" sz="600" b="1" spc="100" kern="0" dirty="0">
                 <a:solidFill>
                   <a:srgbClr val="FF5700"/>
                 </a:solidFill>
@@ -7706,7 +7706,7 @@
                 <a:ea typeface="Geist" pitchFamily="34" charset="-122"/>
                 <a:cs typeface="Geist" pitchFamily="34" charset="-120"/>
               </a:rPr>
-              <a:t>■</a:t>
+              <a:t>  ■</a:t>
             </a:r>
             <a:endParaRPr lang="en-US" sz="1400" dirty="0"/>
           </a:p>
@@ -7720,7 +7720,7 @@
         </p:nvSpPr>
         <p:spPr>
           <a:xfrm>
-            <a:off x="457200" y="813816"/>
+            <a:off x="457200" y="905256"/>
             <a:ext cx="91440" cy="91440"/>
           </a:xfrm>
           <a:prstGeom prst="rect">
@@ -7740,7 +7740,7 @@
         </p:nvSpPr>
         <p:spPr>
           <a:xfrm>
-            <a:off x="621792" y="713232"/>
+            <a:off x="621792" y="804672"/>
             <a:ext cx="6400800" cy="292608"/>
           </a:xfrm>
           <a:prstGeom prst="rect">
@@ -7779,7 +7779,7 @@
         </p:nvSpPr>
         <p:spPr>
           <a:xfrm>
-            <a:off x="457200" y="987552"/>
+            <a:off x="457200" y="1078992"/>
             <a:ext cx="8229600" cy="640080"/>
           </a:xfrm>
           <a:prstGeom prst="rect">
@@ -8528,8 +8528,8 @@
         </p:nvSpPr>
         <p:spPr>
           <a:xfrm>
-            <a:off x="457200" y="292608"/>
-            <a:ext cx="8229600" cy="231140"/>
+            <a:off x="457200" y="274320"/>
+            <a:ext cx="8229600" cy="248920"/>
           </a:xfrm>
           <a:prstGeom prst="rect">
             <a:avLst/>
@@ -8545,7 +8545,7 @@
               <a:buNone/>
             </a:pPr>
             <a:r>
-              <a:rPr lang="en-US" sz="1400" b="1" spc="-200" kern="0" dirty="0">
+              <a:rPr lang="en-US" sz="1400" b="1" spc="100" kern="0" dirty="0">
                 <a:solidFill>
                   <a:srgbClr val="1C1C1C"/>
                 </a:solidFill>
@@ -8553,13 +8553,13 @@
                 <a:ea typeface="Geist" pitchFamily="34" charset="-122"/>
                 <a:cs typeface="Geist" pitchFamily="34" charset="-120"/>
               </a:rPr>
-              <a:t>learn with </a:t>
-            </a:r>
-            <a:pPr indent="0" marL="0">
-              <a:buNone/>
-            </a:pPr>
-            <a:r>
-              <a:rPr lang="en-US" sz="1400" b="1" spc="-200" kern="0" dirty="0">
+              <a:t>learn  with  </a:t>
+            </a:r>
+            <a:pPr indent="0" marL="0">
+              <a:buNone/>
+            </a:pPr>
+            <a:r>
+              <a:rPr lang="en-US" sz="1400" b="1" spc="100" kern="0" dirty="0">
                 <a:solidFill>
                   <a:srgbClr val="FF5700"/>
                 </a:solidFill>
@@ -8573,7 +8573,7 @@
               <a:buNone/>
             </a:pPr>
             <a:r>
-              <a:rPr lang="en-US" sz="600" b="1" spc="-200" kern="0" dirty="0">
+              <a:rPr lang="en-US" sz="600" b="1" spc="100" kern="0" dirty="0">
                 <a:solidFill>
                   <a:srgbClr val="FF5700"/>
                 </a:solidFill>
@@ -8581,7 +8581,7 @@
                 <a:ea typeface="Geist" pitchFamily="34" charset="-122"/>
                 <a:cs typeface="Geist" pitchFamily="34" charset="-120"/>
               </a:rPr>
-              <a:t>■</a:t>
+              <a:t>  ■</a:t>
             </a:r>
             <a:endParaRPr lang="en-US" sz="1400" dirty="0"/>
           </a:p>
@@ -8595,7 +8595,7 @@
         </p:nvSpPr>
         <p:spPr>
           <a:xfrm>
-            <a:off x="457200" y="813816"/>
+            <a:off x="457200" y="905256"/>
             <a:ext cx="91440" cy="91440"/>
           </a:xfrm>
           <a:prstGeom prst="rect">
@@ -8615,7 +8615,7 @@
         </p:nvSpPr>
         <p:spPr>
           <a:xfrm>
-            <a:off x="621792" y="713232"/>
+            <a:off x="621792" y="804672"/>
             <a:ext cx="6400800" cy="292608"/>
           </a:xfrm>
           <a:prstGeom prst="rect">
@@ -8654,7 +8654,7 @@
         </p:nvSpPr>
         <p:spPr>
           <a:xfrm>
-            <a:off x="457200" y="987552"/>
+            <a:off x="457200" y="1078992"/>
             <a:ext cx="8229600" cy="640080"/>
           </a:xfrm>
           <a:prstGeom prst="rect">
@@ -9101,8 +9101,8 @@
         </p:nvSpPr>
         <p:spPr>
           <a:xfrm>
-            <a:off x="457200" y="292608"/>
-            <a:ext cx="8229600" cy="231140"/>
+            <a:off x="457200" y="274320"/>
+            <a:ext cx="8229600" cy="248920"/>
           </a:xfrm>
           <a:prstGeom prst="rect">
             <a:avLst/>
@@ -9118,7 +9118,7 @@
               <a:buNone/>
             </a:pPr>
             <a:r>
-              <a:rPr lang="en-US" sz="1400" b="1" spc="-200" kern="0" dirty="0">
+              <a:rPr lang="en-US" sz="1400" b="1" spc="100" kern="0" dirty="0">
                 <a:solidFill>
                   <a:srgbClr val="1C1C1C"/>
                 </a:solidFill>
@@ -9126,13 +9126,13 @@
                 <a:ea typeface="Geist" pitchFamily="34" charset="-122"/>
                 <a:cs typeface="Geist" pitchFamily="34" charset="-120"/>
               </a:rPr>
-              <a:t>learn with </a:t>
-            </a:r>
-            <a:pPr indent="0" marL="0">
-              <a:buNone/>
-            </a:pPr>
-            <a:r>
-              <a:rPr lang="en-US" sz="1400" b="1" spc="-200" kern="0" dirty="0">
+              <a:t>learn  with  </a:t>
+            </a:r>
+            <a:pPr indent="0" marL="0">
+              <a:buNone/>
+            </a:pPr>
+            <a:r>
+              <a:rPr lang="en-US" sz="1400" b="1" spc="100" kern="0" dirty="0">
                 <a:solidFill>
                   <a:srgbClr val="FF5700"/>
                 </a:solidFill>
@@ -9146,7 +9146,7 @@
               <a:buNone/>
             </a:pPr>
             <a:r>
-              <a:rPr lang="en-US" sz="600" b="1" spc="-200" kern="0" dirty="0">
+              <a:rPr lang="en-US" sz="600" b="1" spc="100" kern="0" dirty="0">
                 <a:solidFill>
                   <a:srgbClr val="FF5700"/>
                 </a:solidFill>
@@ -9154,7 +9154,7 @@
                 <a:ea typeface="Geist" pitchFamily="34" charset="-122"/>
                 <a:cs typeface="Geist" pitchFamily="34" charset="-120"/>
               </a:rPr>
-              <a:t>■</a:t>
+              <a:t>  ■</a:t>
             </a:r>
             <a:endParaRPr lang="en-US" sz="1400" dirty="0"/>
           </a:p>
@@ -9168,7 +9168,7 @@
         </p:nvSpPr>
         <p:spPr>
           <a:xfrm>
-            <a:off x="457200" y="813816"/>
+            <a:off x="457200" y="905256"/>
             <a:ext cx="91440" cy="91440"/>
           </a:xfrm>
           <a:prstGeom prst="rect">
@@ -9188,7 +9188,7 @@
         </p:nvSpPr>
         <p:spPr>
           <a:xfrm>
-            <a:off x="621792" y="713232"/>
+            <a:off x="621792" y="804672"/>
             <a:ext cx="6400800" cy="292608"/>
           </a:xfrm>
           <a:prstGeom prst="rect">
@@ -9227,7 +9227,7 @@
         </p:nvSpPr>
         <p:spPr>
           <a:xfrm>
-            <a:off x="457200" y="987552"/>
+            <a:off x="457200" y="1078992"/>
             <a:ext cx="8229600" cy="640080"/>
           </a:xfrm>
           <a:prstGeom prst="rect">
@@ -9840,8 +9840,8 @@
         </p:nvSpPr>
         <p:spPr>
           <a:xfrm>
-            <a:off x="457200" y="292608"/>
-            <a:ext cx="8229600" cy="231140"/>
+            <a:off x="457200" y="274320"/>
+            <a:ext cx="8229600" cy="248920"/>
           </a:xfrm>
           <a:prstGeom prst="rect">
             <a:avLst/>
@@ -9857,7 +9857,7 @@
               <a:buNone/>
             </a:pPr>
             <a:r>
-              <a:rPr lang="en-US" sz="1400" b="1" spc="-200" kern="0" dirty="0">
+              <a:rPr lang="en-US" sz="1400" b="1" spc="100" kern="0" dirty="0">
                 <a:solidFill>
                   <a:srgbClr val="1C1C1C"/>
                 </a:solidFill>
@@ -9865,13 +9865,13 @@
                 <a:ea typeface="Geist" pitchFamily="34" charset="-122"/>
                 <a:cs typeface="Geist" pitchFamily="34" charset="-120"/>
               </a:rPr>
-              <a:t>learn with </a:t>
-            </a:r>
-            <a:pPr indent="0" marL="0">
-              <a:buNone/>
-            </a:pPr>
-            <a:r>
-              <a:rPr lang="en-US" sz="1400" b="1" spc="-200" kern="0" dirty="0">
+              <a:t>learn  with  </a:t>
+            </a:r>
+            <a:pPr indent="0" marL="0">
+              <a:buNone/>
+            </a:pPr>
+            <a:r>
+              <a:rPr lang="en-US" sz="1400" b="1" spc="100" kern="0" dirty="0">
                 <a:solidFill>
                   <a:srgbClr val="FF5700"/>
                 </a:solidFill>
@@ -9885,7 +9885,7 @@
               <a:buNone/>
             </a:pPr>
             <a:r>
-              <a:rPr lang="en-US" sz="600" b="1" spc="-200" kern="0" dirty="0">
+              <a:rPr lang="en-US" sz="600" b="1" spc="100" kern="0" dirty="0">
                 <a:solidFill>
                   <a:srgbClr val="FF5700"/>
                 </a:solidFill>
@@ -9893,7 +9893,7 @@
                 <a:ea typeface="Geist" pitchFamily="34" charset="-122"/>
                 <a:cs typeface="Geist" pitchFamily="34" charset="-120"/>
               </a:rPr>
-              <a:t>■</a:t>
+              <a:t>  ■</a:t>
             </a:r>
             <a:endParaRPr lang="en-US" sz="1400" dirty="0"/>
           </a:p>
@@ -9907,7 +9907,7 @@
         </p:nvSpPr>
         <p:spPr>
           <a:xfrm>
-            <a:off x="457200" y="813816"/>
+            <a:off x="457200" y="905256"/>
             <a:ext cx="91440" cy="91440"/>
           </a:xfrm>
           <a:prstGeom prst="rect">
@@ -9927,7 +9927,7 @@
         </p:nvSpPr>
         <p:spPr>
           <a:xfrm>
-            <a:off x="621792" y="713232"/>
+            <a:off x="621792" y="804672"/>
             <a:ext cx="6400800" cy="292608"/>
           </a:xfrm>
           <a:prstGeom prst="rect">
@@ -9966,7 +9966,7 @@
         </p:nvSpPr>
         <p:spPr>
           <a:xfrm>
-            <a:off x="457200" y="987552"/>
+            <a:off x="457200" y="1078992"/>
             <a:ext cx="8229600" cy="640080"/>
           </a:xfrm>
           <a:prstGeom prst="rect">
